--- a/Common/STM32F446REピンアウト/STM32F446RE.pptx
+++ b/Common/STM32F446REピンアウト/STM32F446RE.pptx
@@ -243,7 +243,7 @@
           <a:p>
             <a:fld id="{482D1548-3D3F-44CD-93D8-B11B39649077}" type="datetimeFigureOut">
               <a:rPr kumimoji="1" lang="ja-JP" altLang="en-US" smtClean="0"/>
-              <a:t>2026/6/29</a:t>
+              <a:t>2026/7/2</a:t>
             </a:fld>
             <a:endParaRPr kumimoji="1" lang="ja-JP" altLang="en-US"/>
           </a:p>
@@ -445,7 +445,7 @@
           <a:p>
             <a:fld id="{482D1548-3D3F-44CD-93D8-B11B39649077}" type="datetimeFigureOut">
               <a:rPr kumimoji="1" lang="ja-JP" altLang="en-US" smtClean="0"/>
-              <a:t>2026/6/29</a:t>
+              <a:t>2026/7/2</a:t>
             </a:fld>
             <a:endParaRPr kumimoji="1" lang="ja-JP" altLang="en-US"/>
           </a:p>
@@ -657,7 +657,7 @@
           <a:p>
             <a:fld id="{482D1548-3D3F-44CD-93D8-B11B39649077}" type="datetimeFigureOut">
               <a:rPr kumimoji="1" lang="ja-JP" altLang="en-US" smtClean="0"/>
-              <a:t>2026/6/29</a:t>
+              <a:t>2026/7/2</a:t>
             </a:fld>
             <a:endParaRPr kumimoji="1" lang="ja-JP" altLang="en-US"/>
           </a:p>
@@ -859,7 +859,7 @@
           <a:p>
             <a:fld id="{482D1548-3D3F-44CD-93D8-B11B39649077}" type="datetimeFigureOut">
               <a:rPr kumimoji="1" lang="ja-JP" altLang="en-US" smtClean="0"/>
-              <a:t>2026/6/29</a:t>
+              <a:t>2026/7/2</a:t>
             </a:fld>
             <a:endParaRPr kumimoji="1" lang="ja-JP" altLang="en-US"/>
           </a:p>
@@ -1105,7 +1105,7 @@
           <a:p>
             <a:fld id="{482D1548-3D3F-44CD-93D8-B11B39649077}" type="datetimeFigureOut">
               <a:rPr kumimoji="1" lang="ja-JP" altLang="en-US" smtClean="0"/>
-              <a:t>2026/6/29</a:t>
+              <a:t>2026/7/2</a:t>
             </a:fld>
             <a:endParaRPr kumimoji="1" lang="ja-JP" altLang="en-US"/>
           </a:p>
@@ -1401,7 +1401,7 @@
           <a:p>
             <a:fld id="{482D1548-3D3F-44CD-93D8-B11B39649077}" type="datetimeFigureOut">
               <a:rPr kumimoji="1" lang="ja-JP" altLang="en-US" smtClean="0"/>
-              <a:t>2026/6/29</a:t>
+              <a:t>2026/7/2</a:t>
             </a:fld>
             <a:endParaRPr kumimoji="1" lang="ja-JP" altLang="en-US"/>
           </a:p>
@@ -1832,7 +1832,7 @@
           <a:p>
             <a:fld id="{482D1548-3D3F-44CD-93D8-B11B39649077}" type="datetimeFigureOut">
               <a:rPr kumimoji="1" lang="ja-JP" altLang="en-US" smtClean="0"/>
-              <a:t>2026/6/29</a:t>
+              <a:t>2026/7/2</a:t>
             </a:fld>
             <a:endParaRPr kumimoji="1" lang="ja-JP" altLang="en-US"/>
           </a:p>
@@ -1950,7 +1950,7 @@
           <a:p>
             <a:fld id="{482D1548-3D3F-44CD-93D8-B11B39649077}" type="datetimeFigureOut">
               <a:rPr kumimoji="1" lang="ja-JP" altLang="en-US" smtClean="0"/>
-              <a:t>2026/6/29</a:t>
+              <a:t>2026/7/2</a:t>
             </a:fld>
             <a:endParaRPr kumimoji="1" lang="ja-JP" altLang="en-US"/>
           </a:p>
@@ -2045,7 +2045,7 @@
           <a:p>
             <a:fld id="{482D1548-3D3F-44CD-93D8-B11B39649077}" type="datetimeFigureOut">
               <a:rPr kumimoji="1" lang="ja-JP" altLang="en-US" smtClean="0"/>
-              <a:t>2026/6/29</a:t>
+              <a:t>2026/7/2</a:t>
             </a:fld>
             <a:endParaRPr kumimoji="1" lang="ja-JP" altLang="en-US"/>
           </a:p>
@@ -2354,7 +2354,7 @@
           <a:p>
             <a:fld id="{482D1548-3D3F-44CD-93D8-B11B39649077}" type="datetimeFigureOut">
               <a:rPr kumimoji="1" lang="ja-JP" altLang="en-US" smtClean="0"/>
-              <a:t>2026/6/29</a:t>
+              <a:t>2026/7/2</a:t>
             </a:fld>
             <a:endParaRPr kumimoji="1" lang="ja-JP" altLang="en-US"/>
           </a:p>
@@ -2611,7 +2611,7 @@
           <a:p>
             <a:fld id="{482D1548-3D3F-44CD-93D8-B11B39649077}" type="datetimeFigureOut">
               <a:rPr kumimoji="1" lang="ja-JP" altLang="en-US" smtClean="0"/>
-              <a:t>2026/6/29</a:t>
+              <a:t>2026/7/2</a:t>
             </a:fld>
             <a:endParaRPr kumimoji="1" lang="ja-JP" altLang="en-US"/>
           </a:p>
@@ -2856,7 +2856,7 @@
           <a:p>
             <a:fld id="{482D1548-3D3F-44CD-93D8-B11B39649077}" type="datetimeFigureOut">
               <a:rPr kumimoji="1" lang="ja-JP" altLang="en-US" smtClean="0"/>
-              <a:t>2026/6/29</a:t>
+              <a:t>2026/7/2</a:t>
             </a:fld>
             <a:endParaRPr kumimoji="1" lang="ja-JP" altLang="en-US"/>
           </a:p>
@@ -4054,7 +4054,7 @@
           <p:spPr>
             <a:xfrm>
               <a:off x="6358817" y="492413"/>
-              <a:ext cx="1515977" cy="4247317"/>
+              <a:ext cx="1515977" cy="5170646"/>
             </a:xfrm>
             <a:prstGeom prst="rect">
               <a:avLst/>
@@ -4076,13 +4076,22 @@
               <a:endParaRPr kumimoji="1" lang="en-US" altLang="ja-JP" sz="1500" dirty="0"/>
             </a:p>
             <a:p>
-              <a:endParaRPr kumimoji="1" lang="en-US" altLang="ja-JP" sz="1500" dirty="0"/>
-            </a:p>
-            <a:p>
-              <a:endParaRPr kumimoji="1" lang="en-US" altLang="ja-JP" sz="1500" dirty="0"/>
-            </a:p>
-            <a:p>
-              <a:endParaRPr kumimoji="1" lang="en-US" altLang="ja-JP" sz="1500" dirty="0"/>
+              <a:r>
+                <a:rPr kumimoji="1" lang="en-US" altLang="ja-JP" sz="1500" dirty="0"/>
+                <a:t>D</a:t>
+              </a:r>
+            </a:p>
+            <a:p>
+              <a:r>
+                <a:rPr kumimoji="1" lang="en-US" altLang="ja-JP" sz="1500" dirty="0"/>
+                <a:t>D</a:t>
+              </a:r>
+            </a:p>
+            <a:p>
+              <a:r>
+                <a:rPr kumimoji="1" lang="en-US" altLang="ja-JP" sz="1500" dirty="0"/>
+                <a:t>D</a:t>
+              </a:r>
             </a:p>
             <a:p>
               <a:r>
@@ -4091,7 +4100,10 @@
               </a:r>
             </a:p>
             <a:p>
-              <a:endParaRPr kumimoji="1" lang="en-US" altLang="ja-JP" sz="1500" dirty="0"/>
+              <a:r>
+                <a:rPr kumimoji="1" lang="en-US" altLang="ja-JP" sz="1500" dirty="0"/>
+                <a:t>A/D</a:t>
+              </a:r>
             </a:p>
             <a:p>
               <a:r>
@@ -4100,19 +4112,34 @@
               </a:r>
             </a:p>
             <a:p>
-              <a:endParaRPr kumimoji="1" lang="en-US" altLang="ja-JP" sz="1500" dirty="0"/>
-            </a:p>
-            <a:p>
-              <a:endParaRPr kumimoji="1" lang="en-US" altLang="ja-JP" sz="1500" dirty="0"/>
-            </a:p>
-            <a:p>
-              <a:endParaRPr kumimoji="1" lang="en-US" altLang="ja-JP" sz="1500" dirty="0"/>
-            </a:p>
-            <a:p>
-              <a:endParaRPr kumimoji="1" lang="en-US" altLang="ja-JP" sz="1500" dirty="0"/>
-            </a:p>
-            <a:p>
-              <a:endParaRPr kumimoji="1" lang="en-US" altLang="ja-JP" sz="1500" dirty="0"/>
+              <a:r>
+                <a:rPr kumimoji="1" lang="en-US" altLang="ja-JP" sz="1500" dirty="0"/>
+                <a:t>A/D</a:t>
+              </a:r>
+            </a:p>
+            <a:p>
+              <a:r>
+                <a:rPr kumimoji="1" lang="en-US" altLang="ja-JP" sz="1500" dirty="0"/>
+                <a:t>A/D</a:t>
+              </a:r>
+            </a:p>
+            <a:p>
+              <a:r>
+                <a:rPr kumimoji="1" lang="en-US" altLang="ja-JP" sz="1500" dirty="0"/>
+                <a:t>A/D</a:t>
+              </a:r>
+            </a:p>
+            <a:p>
+              <a:r>
+                <a:rPr kumimoji="1" lang="en-US" altLang="ja-JP" sz="1500" dirty="0"/>
+                <a:t>A/D</a:t>
+              </a:r>
+            </a:p>
+            <a:p>
+              <a:r>
+                <a:rPr kumimoji="1" lang="en-US" altLang="ja-JP" sz="1500" dirty="0"/>
+                <a:t>A/D</a:t>
+              </a:r>
             </a:p>
             <a:p>
               <a:r>
@@ -4136,6 +4163,30 @@
               <a:r>
                 <a:rPr kumimoji="1" lang="en-US" altLang="ja-JP" sz="1500" dirty="0"/>
                 <a:t>Serial4 TX</a:t>
+              </a:r>
+            </a:p>
+            <a:p>
+              <a:r>
+                <a:rPr kumimoji="1" lang="en-US" altLang="ja-JP" sz="1500" dirty="0"/>
+                <a:t>A/D</a:t>
+              </a:r>
+            </a:p>
+            <a:p>
+              <a:r>
+                <a:rPr kumimoji="1" lang="en-US" altLang="ja-JP" sz="1500" dirty="0"/>
+                <a:t>A/D</a:t>
+              </a:r>
+            </a:p>
+            <a:p>
+              <a:r>
+                <a:rPr kumimoji="1" lang="en-US" altLang="ja-JP" sz="1500" dirty="0"/>
+                <a:t>A/D</a:t>
+              </a:r>
+            </a:p>
+            <a:p>
+              <a:r>
+                <a:rPr kumimoji="1" lang="en-US" altLang="ja-JP" sz="1500" dirty="0"/>
+                <a:t>A/D</a:t>
               </a:r>
               <a:endParaRPr kumimoji="1" lang="ja-JP" altLang="en-US" sz="1500" dirty="0"/>
             </a:p>
@@ -4170,7 +4221,10 @@
             <a:lstStyle/>
             <a:p>
               <a:pPr algn="r"/>
-              <a:endParaRPr kumimoji="1" lang="en-US" altLang="ja-JP" sz="1500" dirty="0"/>
+              <a:r>
+                <a:rPr kumimoji="1" lang="en-US" altLang="ja-JP" sz="1500" dirty="0"/>
+                <a:t>D</a:t>
+              </a:r>
             </a:p>
             <a:p>
               <a:pPr algn="r"/>
@@ -4192,7 +4246,10 @@
             </a:p>
             <a:p>
               <a:pPr algn="r"/>
-              <a:endParaRPr kumimoji="1" lang="en-US" altLang="ja-JP" sz="1500" dirty="0"/>
+              <a:r>
+                <a:rPr kumimoji="1" lang="en-US" altLang="ja-JP" sz="1500" dirty="0"/>
+                <a:t>D</a:t>
+              </a:r>
             </a:p>
             <a:p>
               <a:pPr algn="r"/>
@@ -4210,7 +4267,17 @@
             </a:p>
             <a:p>
               <a:pPr algn="r"/>
-              <a:endParaRPr kumimoji="1" lang="en-US" altLang="ja-JP" sz="1500" dirty="0"/>
+              <a:r>
+                <a:rPr kumimoji="1" lang="en-US" altLang="ja-JP" sz="1500" dirty="0"/>
+                <a:t>D</a:t>
+              </a:r>
+            </a:p>
+            <a:p>
+              <a:pPr algn="r"/>
+              <a:r>
+                <a:rPr kumimoji="1" lang="en-US" altLang="ja-JP" sz="1500" dirty="0"/>
+                <a:t>D</a:t>
+              </a:r>
             </a:p>
             <a:p>
               <a:pPr algn="r"/>
@@ -4226,7 +4293,31 @@
             </a:p>
             <a:p>
               <a:pPr algn="r"/>
-              <a:endParaRPr kumimoji="1" lang="en-US" altLang="ja-JP" sz="1500" dirty="0"/>
+              <a:r>
+                <a:rPr kumimoji="1" lang="en-US" altLang="ja-JP" sz="1500" dirty="0"/>
+                <a:t>D</a:t>
+              </a:r>
+            </a:p>
+            <a:p>
+              <a:pPr algn="r"/>
+              <a:r>
+                <a:rPr kumimoji="1" lang="en-US" altLang="ja-JP" sz="1500" dirty="0"/>
+                <a:t>D</a:t>
+              </a:r>
+            </a:p>
+            <a:p>
+              <a:pPr algn="r"/>
+              <a:r>
+                <a:rPr kumimoji="1" lang="en-US" altLang="ja-JP" sz="1500" dirty="0"/>
+                <a:t> TX Serial5</a:t>
+              </a:r>
+            </a:p>
+            <a:p>
+              <a:pPr algn="r"/>
+              <a:r>
+                <a:rPr kumimoji="1" lang="en-US" altLang="ja-JP" sz="1500" dirty="0"/>
+                <a:t>RX Serial5</a:t>
+              </a:r>
             </a:p>
             <a:p>
               <a:pPr algn="r"/>
@@ -4234,28 +4325,6 @@
             </a:p>
             <a:p>
               <a:pPr algn="r"/>
-              <a:endParaRPr kumimoji="1" lang="en-US" altLang="ja-JP" sz="1500" dirty="0"/>
-            </a:p>
-            <a:p>
-              <a:pPr algn="r"/>
-              <a:r>
-                <a:rPr kumimoji="1" lang="en-US" altLang="ja-JP" sz="1500" dirty="0"/>
-                <a:t> TX Serial5</a:t>
-              </a:r>
-            </a:p>
-            <a:p>
-              <a:pPr algn="r"/>
-              <a:r>
-                <a:rPr kumimoji="1" lang="en-US" altLang="ja-JP" sz="1500" dirty="0"/>
-                <a:t>RX Serial5</a:t>
-              </a:r>
-            </a:p>
-            <a:p>
-              <a:pPr algn="r"/>
-              <a:endParaRPr kumimoji="1" lang="en-US" altLang="ja-JP" sz="1500" dirty="0"/>
-            </a:p>
-            <a:p>
-              <a:pPr algn="r"/>
               <a:r>
                 <a:rPr kumimoji="1" lang="en-US" altLang="ja-JP" sz="1500" dirty="0"/>
                 <a:t>SDA I2C3</a:t>
@@ -4263,7 +4332,10 @@
             </a:p>
             <a:p>
               <a:pPr algn="r"/>
-              <a:endParaRPr kumimoji="1" lang="en-US" altLang="ja-JP" sz="1500" dirty="0"/>
+              <a:r>
+                <a:rPr kumimoji="1" lang="en-US" altLang="ja-JP" sz="1500" dirty="0"/>
+                <a:t>D</a:t>
+              </a:r>
             </a:p>
             <a:p>
               <a:pPr algn="r"/>
